--- a/AIA_Architecte_Intelligence_Artificielle/Bloc_3_Pipeline_IA/project_summary_details/Bloc3_AIA_Loic_Valentini.pptx
+++ b/AIA_Architecte_Intelligence_Artificielle/Bloc_3_Pipeline_IA/project_summary_details/Bloc3_AIA_Loic_Valentini.pptx
@@ -9649,7 +9649,7 @@
                 <a:cs typeface="Inter SemiBold"/>
                 <a:sym typeface="Inter SemiBold"/>
               </a:rPr>
-              <a:t>Stopper la fraude bancaire en temps réel grâce à un pipeline IA</a:t>
+              <a:t>Axes d’amélioration du projet</a:t>
             </a:r>
           </a:p>
         </p:txBody>
@@ -9706,18 +9706,11 @@
               </a:rPr>
             </a:br>
             <a:r>
-              <a:rPr lang="fr-FR" sz="1050" dirty="0" err="1">
-                <a:latin typeface="Inter Medium" panose="020B0604020202020204" charset="0"/>
-                <a:ea typeface="Inter Medium" panose="020B0604020202020204" charset="0"/>
-              </a:rPr>
-              <a:t>Caractréistiques</a:t>
-            </a:r>
-            <a:r>
               <a:rPr lang="fr-FR" sz="1050" dirty="0">
                 <a:latin typeface="Inter Medium" panose="020B0604020202020204" charset="0"/>
                 <a:ea typeface="Inter Medium" panose="020B0604020202020204" charset="0"/>
               </a:rPr>
-              <a:t> simples (distance, date/heure) sans enrichissement externe ni historique client</a:t>
+              <a:t>Caractéristiques simples (distance, date/heure) sans enrichissement externe ni historique client</a:t>
             </a:r>
             <a:br>
               <a:rPr lang="fr-FR" sz="1400" dirty="0">
